--- a/presentations/PosterGRC_CenterResults.pptx
+++ b/presentations/PosterGRC_CenterResults.pptx
@@ -2318,7 +2318,7 @@
         </p:blipFill>
         <p:spPr>
           <a:xfrm>
-            <a:off x="13707509" y="17454866"/>
+            <a:off x="13707509" y="18135600"/>
             <a:ext cx="8687732" cy="4233194"/>
           </a:xfrm>
           <a:prstGeom prst="rect">
@@ -3357,7 +3357,7 @@
         </p:nvSpPr>
         <p:spPr bwMode="auto">
           <a:xfrm>
-            <a:off x="15124192" y="7524620"/>
+            <a:off x="15124192" y="7391400"/>
             <a:ext cx="13944600" cy="4801314"/>
           </a:xfrm>
           <a:prstGeom prst="rect">
@@ -3639,8 +3639,8 @@
         </p:nvSpPr>
         <p:spPr bwMode="auto">
           <a:xfrm>
-            <a:off x="15267568" y="29713308"/>
-            <a:ext cx="13944600" cy="8402483"/>
+            <a:off x="15267568" y="30480959"/>
+            <a:ext cx="13944600" cy="7695241"/>
           </a:xfrm>
           <a:prstGeom prst="rect">
             <a:avLst/>
@@ -3764,7 +3764,7 @@
               <a:rPr lang="en-US" sz="4800" b="1" i="1" dirty="0">
                 <a:latin typeface="+mn-lt"/>
               </a:rPr>
-              <a:t>Rolling and twisting friction reorganize the force-chain backbone. </a:t>
+              <a:t>Friction reorganizes the force-chain backbone. </a:t>
             </a:r>
           </a:p>
           <a:p>
@@ -3780,7 +3780,7 @@
           </a:p>
           <a:p>
             <a:r>
-              <a:rPr lang="en-US" sz="4800" b="1" dirty="0">
+              <a:rPr lang="en-US" sz="4800" b="1" i="1" dirty="0">
                 <a:latin typeface="+mn-lt"/>
               </a:rPr>
               <a:t>Higher friction produces:</a:t>
@@ -3819,7 +3819,7 @@
               <a:rPr lang="en-US" sz="4800" dirty="0">
                 <a:latin typeface="+mn-lt"/>
               </a:rPr>
-              <a:t>larger bend angles and tortuosity</a:t>
+              <a:t>larger bend angles </a:t>
             </a:r>
           </a:p>
           <a:p>
@@ -3862,7 +3862,7 @@
         </p:nvSpPr>
         <p:spPr>
           <a:xfrm>
-            <a:off x="15220167" y="28811790"/>
+            <a:off x="15220167" y="29413200"/>
             <a:ext cx="13944600" cy="914400"/>
           </a:xfrm>
           <a:prstGeom prst="rect">
@@ -11425,7 +11425,7 @@
         </p:blipFill>
         <p:spPr>
           <a:xfrm>
-            <a:off x="14545709" y="21205781"/>
+            <a:off x="14545709" y="21886515"/>
             <a:ext cx="6709978" cy="3807738"/>
           </a:xfrm>
           <a:prstGeom prst="rect">
@@ -11461,7 +11461,7 @@
         </p:blipFill>
         <p:spPr>
           <a:xfrm>
-            <a:off x="21600249" y="21157333"/>
+            <a:off x="21600249" y="21838067"/>
             <a:ext cx="6462152" cy="4217267"/>
           </a:xfrm>
           <a:prstGeom prst="rect">
@@ -11497,8 +11497,8 @@
         </p:blipFill>
         <p:spPr>
           <a:xfrm>
-            <a:off x="21050826" y="17503156"/>
-            <a:ext cx="8061695" cy="4118302"/>
+            <a:off x="21050826" y="18494454"/>
+            <a:ext cx="7453757" cy="3807738"/>
           </a:xfrm>
           <a:prstGeom prst="rect">
             <a:avLst/>
@@ -11533,7 +11533,7 @@
         </p:blipFill>
         <p:spPr>
           <a:xfrm>
-            <a:off x="28181300" y="19305328"/>
+            <a:off x="28181300" y="19986062"/>
             <a:ext cx="1460500" cy="3543300"/>
           </a:xfrm>
           <a:prstGeom prst="rect">
@@ -12149,7 +12149,7 @@
         </p:nvSpPr>
         <p:spPr>
           <a:xfrm>
-            <a:off x="15267568" y="27848306"/>
+            <a:off x="15267568" y="28078093"/>
             <a:ext cx="13944600" cy="954107"/>
           </a:xfrm>
           <a:prstGeom prst="rect">
@@ -12336,7 +12336,7 @@
         </p:blipFill>
         <p:spPr>
           <a:xfrm>
-            <a:off x="17932813" y="26063696"/>
+            <a:off x="17932813" y="26564484"/>
             <a:ext cx="914400" cy="914400"/>
           </a:xfrm>
           <a:prstGeom prst="rect">
@@ -12372,7 +12372,7 @@
         </p:blipFill>
         <p:spPr>
           <a:xfrm>
-            <a:off x="25232684" y="26058650"/>
+            <a:off x="25232684" y="26559438"/>
             <a:ext cx="914400" cy="914400"/>
           </a:xfrm>
           <a:prstGeom prst="rect">
@@ -12395,14 +12395,14 @@
           <p:nvPr>
             <p:extLst>
               <p:ext uri="{D42A27DB-BD31-4B8C-83A1-F6EECF244321}">
-                <p14:modId xmlns:p14="http://schemas.microsoft.com/office/powerpoint/2010/main" val="1086937259"/>
+                <p14:modId xmlns:p14="http://schemas.microsoft.com/office/powerpoint/2010/main" val="80592908"/>
               </p:ext>
             </p:extLst>
           </p:nvPr>
         </p:nvGraphicFramePr>
         <p:xfrm>
-          <a:off x="15986288" y="12352590"/>
-          <a:ext cx="12199221" cy="5579838"/>
+          <a:off x="15986288" y="12192000"/>
+          <a:ext cx="12199221" cy="6509811"/>
         </p:xfrm>
         <a:graphic>
           <a:graphicData uri="http://schemas.openxmlformats.org/drawingml/2006/table">
@@ -12481,22 +12481,8 @@
                           <a:ea typeface="+mn-ea"/>
                           <a:cs typeface="+mn-cs"/>
                         </a:rPr>
-                        <a:t>Low Friction</a:t>
+                        <a:t>Metric </a:t>
                       </a:r>
-                      <a:endParaRPr kumimoji="0" lang="en-US" sz="2800" b="1" i="0" u="none" strike="noStrike" kern="1200" cap="none" spc="0" normalizeH="0" baseline="0" noProof="0" dirty="0">
-                        <a:ln>
-                          <a:noFill/>
-                        </a:ln>
-                        <a:solidFill>
-                          <a:srgbClr val="FFFFFF"/>
-                        </a:solidFill>
-                        <a:effectLst/>
-                        <a:uLnTx/>
-                        <a:uFillTx/>
-                        <a:latin typeface="+mn-lt"/>
-                        <a:ea typeface="+mn-ea"/>
-                        <a:cs typeface="+mn-cs"/>
-                      </a:endParaRPr>
                     </a:p>
                   </a:txBody>
                   <a:tcPr anchor="ctr">
@@ -12691,6 +12677,122 @@
                     <a:lstStyle/>
                     <a:p>
                       <a:r>
+                        <a:rPr lang="en-US" sz="2800" dirty="0">
+                          <a:latin typeface="+mn-lt"/>
+                        </a:rPr>
+                        <a:t>Chain height (</a:t>
+                      </a:r>
+                      <a:r>
+                        <a:rPr lang="en-US" sz="2800" i="1" dirty="0">
+                          <a:latin typeface="+mn-lt"/>
+                        </a:rPr>
+                        <a:t>z</a:t>
+                      </a:r>
+                      <a:r>
+                        <a:rPr lang="en-US" sz="2800" dirty="0">
+                          <a:latin typeface="+mn-lt"/>
+                        </a:rPr>
+                        <a:t>)</a:t>
+                      </a:r>
+                    </a:p>
+                  </a:txBody>
+                  <a:tcPr anchor="ctr"/>
+                </a:tc>
+                <a:tc>
+                  <a:txBody>
+                    <a:bodyPr/>
+                    <a:lstStyle/>
+                    <a:p>
+                      <a:pPr algn="ctr"/>
+                      <a:r>
+                        <a:rPr lang="en-US" sz="2800" dirty="0">
+                          <a:latin typeface="+mn-lt"/>
+                        </a:rPr>
+                        <a:t>1.62</a:t>
+                      </a:r>
+                    </a:p>
+                  </a:txBody>
+                  <a:tcPr anchor="ctr"/>
+                </a:tc>
+                <a:tc>
+                  <a:txBody>
+                    <a:bodyPr/>
+                    <a:lstStyle/>
+                    <a:p>
+                      <a:pPr algn="ctr"/>
+                      <a:r>
+                        <a:rPr lang="en-US" sz="2800" dirty="0">
+                          <a:latin typeface="+mn-lt"/>
+                        </a:rPr>
+                        <a:t>1.79</a:t>
+                      </a:r>
+                    </a:p>
+                  </a:txBody>
+                  <a:tcPr anchor="ctr"/>
+                </a:tc>
+                <a:tc>
+                  <a:txBody>
+                    <a:bodyPr/>
+                    <a:lstStyle/>
+                    <a:p>
+                      <a:pPr marL="0" marR="0" lvl="0" indent="0" algn="ctr" defTabSz="4389120" rtl="0" eaLnBrk="1" fontAlgn="auto" latinLnBrk="0" hangingPunct="1">
+                        <a:lnSpc>
+                          <a:spcPct val="100000"/>
+                        </a:lnSpc>
+                        <a:spcBef>
+                          <a:spcPts val="0"/>
+                        </a:spcBef>
+                        <a:spcAft>
+                          <a:spcPts val="0"/>
+                        </a:spcAft>
+                        <a:buClrTx/>
+                        <a:buSzTx/>
+                        <a:buFontTx/>
+                        <a:buNone/>
+                        <a:tabLst/>
+                        <a:defRPr/>
+                      </a:pPr>
+                      <a:r>
+                        <a:rPr lang="en-US" sz="2800" dirty="0">
+                          <a:solidFill>
+                            <a:schemeClr val="tx1"/>
+                          </a:solidFill>
+                          <a:latin typeface="+mn-lt"/>
+                        </a:rPr>
+                        <a:t>↑</a:t>
+                      </a:r>
+                      <a:r>
+                        <a:rPr lang="en-US" sz="2800">
+                          <a:solidFill>
+                            <a:schemeClr val="tx1"/>
+                          </a:solidFill>
+                          <a:latin typeface="+mn-lt"/>
+                        </a:rPr>
+                        <a:t>10%</a:t>
+                      </a:r>
+                      <a:endParaRPr lang="en-US" sz="2800" dirty="0">
+                        <a:solidFill>
+                          <a:schemeClr val="tx1"/>
+                        </a:solidFill>
+                        <a:latin typeface="+mn-lt"/>
+                      </a:endParaRPr>
+                    </a:p>
+                  </a:txBody>
+                  <a:tcPr anchor="ctr"/>
+                </a:tc>
+                <a:extLst>
+                  <a:ext uri="{0D108BD9-81ED-4DB2-BD59-A6C34878D82A}">
+                    <a16:rowId xmlns:a16="http://schemas.microsoft.com/office/drawing/2014/main" val="2026445813"/>
+                  </a:ext>
+                </a:extLst>
+              </a:tr>
+              <a:tr h="929973">
+                <a:tc>
+                  <a:txBody>
+                    <a:bodyPr/>
+                    <a:lstStyle/>
+                    <a:p>
+                      <a:r>
                         <a:rPr lang="en-US" sz="2800" dirty="0"/>
                         <a:t>Bend angle</a:t>
                       </a:r>
@@ -12800,7 +12902,39 @@
                             <a:prstClr val="black"/>
                           </a:solidFill>
                         </a:rPr>
-                        <a:t>Anchor radius</a:t>
+                        <a:t>Anchor radius (</a:t>
+                      </a:r>
+                      <a:r>
+                        <a:rPr lang="en-US" sz="2800" i="1" dirty="0" err="1">
+                          <a:solidFill>
+                            <a:prstClr val="black"/>
+                          </a:solidFill>
+                        </a:rPr>
+                        <a:t>r</a:t>
+                      </a:r>
+                      <a:r>
+                        <a:rPr lang="en-US" sz="2800" i="1" baseline="-25000" dirty="0" err="1">
+                          <a:solidFill>
+                            <a:prstClr val="black"/>
+                          </a:solidFill>
+                        </a:rPr>
+                        <a:t>anchor</a:t>
+                      </a:r>
+                      <a:r>
+                        <a:rPr lang="en-US" sz="2800" i="1" dirty="0">
+                          <a:solidFill>
+                            <a:prstClr val="black"/>
+                          </a:solidFill>
+                        </a:rPr>
+                        <a:t>/R</a:t>
+                      </a:r>
+                      <a:r>
+                        <a:rPr lang="en-US" sz="2800" dirty="0">
+                          <a:solidFill>
+                            <a:prstClr val="black"/>
+                          </a:solidFill>
+                        </a:rPr>
+                        <a:t>)</a:t>
                       </a:r>
                       <a:endParaRPr lang="en-US" sz="2800" dirty="0">
                         <a:latin typeface="+mn-lt"/>
@@ -12895,7 +13029,39 @@
                             <a:prstClr val="black"/>
                           </a:solidFill>
                         </a:rPr>
-                        <a:t>Midpoint radius </a:t>
+                        <a:t>Midpoint radius (</a:t>
+                      </a:r>
+                      <a:r>
+                        <a:rPr lang="en-US" sz="2800" i="1" dirty="0" err="1">
+                          <a:solidFill>
+                            <a:prstClr val="black"/>
+                          </a:solidFill>
+                        </a:rPr>
+                        <a:t>r</a:t>
+                      </a:r>
+                      <a:r>
+                        <a:rPr lang="en-US" sz="2800" i="1" baseline="-25000" dirty="0" err="1">
+                          <a:solidFill>
+                            <a:prstClr val="black"/>
+                          </a:solidFill>
+                        </a:rPr>
+                        <a:t>mid</a:t>
+                      </a:r>
+                      <a:r>
+                        <a:rPr lang="en-US" sz="2800" i="1" dirty="0">
+                          <a:solidFill>
+                            <a:prstClr val="black"/>
+                          </a:solidFill>
+                        </a:rPr>
+                        <a:t>/R</a:t>
+                      </a:r>
+                      <a:r>
+                        <a:rPr lang="en-US" sz="2800" dirty="0">
+                          <a:solidFill>
+                            <a:prstClr val="black"/>
+                          </a:solidFill>
+                        </a:rPr>
+                        <a:t>)</a:t>
                       </a:r>
                     </a:p>
                   </a:txBody>
@@ -12987,7 +13153,39 @@
                             <a:prstClr val="black"/>
                           </a:solidFill>
                         </a:rPr>
-                        <a:t>Tip radius</a:t>
+                        <a:t>Tip radius (</a:t>
+                      </a:r>
+                      <a:r>
+                        <a:rPr lang="en-US" sz="2800" i="1" dirty="0" err="1">
+                          <a:solidFill>
+                            <a:prstClr val="black"/>
+                          </a:solidFill>
+                        </a:rPr>
+                        <a:t>r</a:t>
+                      </a:r>
+                      <a:r>
+                        <a:rPr lang="en-US" sz="2800" i="1" baseline="-25000" dirty="0" err="1">
+                          <a:solidFill>
+                            <a:prstClr val="black"/>
+                          </a:solidFill>
+                        </a:rPr>
+                        <a:t>tipr</a:t>
+                      </a:r>
+                      <a:r>
+                        <a:rPr lang="en-US" sz="2800" i="1" dirty="0">
+                          <a:solidFill>
+                            <a:prstClr val="black"/>
+                          </a:solidFill>
+                        </a:rPr>
+                        <a:t>/R</a:t>
+                      </a:r>
+                      <a:r>
+                        <a:rPr lang="en-US" sz="2800" dirty="0">
+                          <a:solidFill>
+                            <a:prstClr val="black"/>
+                          </a:solidFill>
+                        </a:rPr>
+                        <a:t>)</a:t>
                       </a:r>
                     </a:p>
                   </a:txBody>
@@ -13068,7 +13266,7 @@
         </p:nvSpPr>
         <p:spPr>
           <a:xfrm>
-            <a:off x="17365109" y="27044792"/>
+            <a:off x="17365109" y="27703046"/>
             <a:ext cx="2061462" cy="338554"/>
           </a:xfrm>
           <a:prstGeom prst="rect">
@@ -13107,7 +13305,7 @@
         </p:nvSpPr>
         <p:spPr>
           <a:xfrm>
-            <a:off x="24676247" y="26998777"/>
+            <a:off x="24676247" y="27657031"/>
             <a:ext cx="2061462" cy="338554"/>
           </a:xfrm>
           <a:prstGeom prst="rect">
